--- a/thesis_bc_project/docs/thesis/figures/editable/thesis_figure_library.pptx
+++ b/thesis_bc_project/docs/thesis/figures/editable/thesis_figure_library.pptx
@@ -5252,8 +5252,17 @@
                 </a:solidFill>
                 <a:latin typeface="Arial"/>
               </a:rPr>
-              <a:t>Proposed GPU
-Framework</a:t>
+              <a:t>Proposed GPU</a:t>
+            </a:r>
+            <a:br/>
+            <a:r>
+              <a:rPr sz="2200" b="1">
+                <a:solidFill>
+                  <a:srgbClr val="343A40"/>
+                </a:solidFill>
+                <a:latin typeface="Arial"/>
+              </a:rPr>
+              <a:t>Framework</a:t>
             </a:r>
           </a:p>
         </p:txBody>
@@ -5347,8 +5356,17 @@
                 </a:solidFill>
                 <a:latin typeface="Arial"/>
               </a:rPr>
-              <a:t>Performance
-Evaluation</a:t>
+              <a:t>Performance</a:t>
+            </a:r>
+            <a:br/>
+            <a:r>
+              <a:rPr sz="2000" b="1">
+                <a:solidFill>
+                  <a:srgbClr val="343A40"/>
+                </a:solidFill>
+                <a:latin typeface="Arial"/>
+              </a:rPr>
+              <a:t>Evaluation</a:t>
             </a:r>
           </a:p>
         </p:txBody>
@@ -5442,8 +5460,17 @@
                 </a:solidFill>
                 <a:latin typeface="Arial"/>
               </a:rPr>
-              <a:t>Ablation
-Analysis</a:t>
+              <a:t>Ablation</a:t>
+            </a:r>
+            <a:br/>
+            <a:r>
+              <a:rPr sz="2000" b="1">
+                <a:solidFill>
+                  <a:srgbClr val="343A40"/>
+                </a:solidFill>
+                <a:latin typeface="Arial"/>
+              </a:rPr>
+              <a:t>Analysis</a:t>
             </a:r>
           </a:p>
         </p:txBody>
@@ -5537,8 +5564,17 @@
                 </a:solidFill>
                 <a:latin typeface="Arial"/>
               </a:rPr>
-              <a:t>Memory
-Scalability</a:t>
+              <a:t>Memory</a:t>
+            </a:r>
+            <a:br/>
+            <a:r>
+              <a:rPr sz="2000" b="1">
+                <a:solidFill>
+                  <a:srgbClr val="343A40"/>
+                </a:solidFill>
+                <a:latin typeface="Arial"/>
+              </a:rPr>
+              <a:t>Scalability</a:t>
             </a:r>
           </a:p>
         </p:txBody>
@@ -5632,8 +5668,17 @@
                 </a:solidFill>
                 <a:latin typeface="Arial"/>
               </a:rPr>
-              <a:t>Correctness
-Validation</a:t>
+              <a:t>Correctness</a:t>
+            </a:r>
+            <a:br/>
+            <a:r>
+              <a:rPr sz="2000" b="1">
+                <a:solidFill>
+                  <a:srgbClr val="343A40"/>
+                </a:solidFill>
+                <a:latin typeface="Arial"/>
+              </a:rPr>
+              <a:t>Validation</a:t>
             </a:r>
           </a:p>
         </p:txBody>
@@ -5708,8 +5753,17 @@
                 </a:solidFill>
                 <a:latin typeface="Arial"/>
               </a:rPr>
-              <a:t>Evidence for
-RQ1--RQ4</a:t>
+              <a:t>Evidence for</a:t>
+            </a:r>
+            <a:br/>
+            <a:r>
+              <a:rPr sz="2000" b="1">
+                <a:solidFill>
+                  <a:srgbClr val="343A40"/>
+                </a:solidFill>
+                <a:latin typeface="Arial"/>
+              </a:rPr>
+              <a:t>RQ1--RQ4</a:t>
             </a:r>
           </a:p>
         </p:txBody>
@@ -6823,8 +6877,17 @@
                 </a:solidFill>
                 <a:latin typeface="Arial"/>
               </a:rPr>
-              <a:t>Success
-b4096</a:t>
+              <a:t>Success</a:t>
+            </a:r>
+            <a:br/>
+            <a:r>
+              <a:rPr sz="1200" b="1">
+                <a:solidFill>
+                  <a:srgbClr val="E69F00"/>
+                </a:solidFill>
+                <a:latin typeface="Arial"/>
+              </a:rPr>
+              <a:t>b4096</a:t>
             </a:r>
           </a:p>
         </p:txBody>
@@ -7105,8 +7168,17 @@
                 </a:solidFill>
                 <a:latin typeface="Arial"/>
               </a:rPr>
-              <a:t>Success
-b10240</a:t>
+              <a:t>Success</a:t>
+            </a:r>
+            <a:br/>
+            <a:r>
+              <a:rPr sz="1200" b="1">
+                <a:solidFill>
+                  <a:srgbClr val="009E73"/>
+                </a:solidFill>
+                <a:latin typeface="Arial"/>
+              </a:rPr>
+              <a:t>b10240</a:t>
             </a:r>
           </a:p>
         </p:txBody>
@@ -7215,8 +7287,17 @@
                 </a:solidFill>
                 <a:latin typeface="Arial"/>
               </a:rPr>
-              <a:t>Host/cgroup
-OOM kill</a:t>
+              <a:t>Host/cgroup</a:t>
+            </a:r>
+            <a:br/>
+            <a:r>
+              <a:rPr sz="1200" b="1">
+                <a:solidFill>
+                  <a:srgbClr val="C23B22"/>
+                </a:solidFill>
+                <a:latin typeface="Arial"/>
+              </a:rPr>
+              <a:t>OOM kill</a:t>
             </a:r>
           </a:p>
         </p:txBody>
@@ -7388,8 +7469,17 @@
                 </a:solidFill>
                 <a:latin typeface="Arial"/>
               </a:rPr>
-              <a:t>Success
-b16384</a:t>
+              <a:t>Success</a:t>
+            </a:r>
+            <a:br/>
+            <a:r>
+              <a:rPr sz="1200" b="1">
+                <a:solidFill>
+                  <a:srgbClr val="2E8B57"/>
+                </a:solidFill>
+                <a:latin typeface="Arial"/>
+              </a:rPr>
+              <a:t>b16384</a:t>
             </a:r>
           </a:p>
         </p:txBody>
@@ -7756,8 +7846,17 @@
                 </a:solidFill>
                 <a:latin typeface="Arial"/>
               </a:rPr>
-              <a:t>Source
-Initialization</a:t>
+              <a:t>Source</a:t>
+            </a:r>
+            <a:br/>
+            <a:r>
+              <a:rPr sz="1700" b="1">
+                <a:solidFill>
+                  <a:srgbClr val="343A40"/>
+                </a:solidFill>
+                <a:latin typeface="Arial"/>
+              </a:rPr>
+              <a:t>Initialization</a:t>
             </a:r>
           </a:p>
         </p:txBody>
@@ -7851,8 +7950,17 @@
                 </a:solidFill>
                 <a:latin typeface="Arial"/>
               </a:rPr>
-              <a:t>BFS
-Traversal</a:t>
+              <a:t>BFS</a:t>
+            </a:r>
+            <a:br/>
+            <a:r>
+              <a:rPr sz="1700" b="1">
+                <a:solidFill>
+                  <a:srgbClr val="343A40"/>
+                </a:solidFill>
+                <a:latin typeface="Arial"/>
+              </a:rPr>
+              <a:t>Traversal</a:t>
             </a:r>
           </a:p>
         </p:txBody>
@@ -7946,8 +8054,17 @@
                 </a:solidFill>
                 <a:latin typeface="Arial"/>
               </a:rPr>
-              <a:t>Distance and
-Path Counting</a:t>
+              <a:t>Distance and</a:t>
+            </a:r>
+            <a:br/>
+            <a:r>
+              <a:rPr sz="1600" b="1">
+                <a:solidFill>
+                  <a:srgbClr val="343A40"/>
+                </a:solidFill>
+                <a:latin typeface="Arial"/>
+              </a:rPr>
+              <a:t>Path Counting</a:t>
             </a:r>
           </a:p>
         </p:txBody>
@@ -8041,9 +8158,27 @@
                 </a:solidFill>
                 <a:latin typeface="Arial"/>
               </a:rPr>
-              <a:t>Reverse
-Dependency
-Accumulation</a:t>
+              <a:t>Reverse</a:t>
+            </a:r>
+            <a:br/>
+            <a:r>
+              <a:rPr sz="1600" b="1">
+                <a:solidFill>
+                  <a:srgbClr val="343A40"/>
+                </a:solidFill>
+                <a:latin typeface="Arial"/>
+              </a:rPr>
+              <a:t>Dependency</a:t>
+            </a:r>
+            <a:br/>
+            <a:r>
+              <a:rPr sz="1600" b="1">
+                <a:solidFill>
+                  <a:srgbClr val="343A40"/>
+                </a:solidFill>
+                <a:latin typeface="Arial"/>
+              </a:rPr>
+              <a:t>Accumulation</a:t>
             </a:r>
           </a:p>
         </p:txBody>
@@ -8137,8 +8272,17 @@
                 </a:solidFill>
                 <a:latin typeface="Arial"/>
               </a:rPr>
-              <a:t>BC
-Accumulation</a:t>
+              <a:t>BC</a:t>
+            </a:r>
+            <a:br/>
+            <a:r>
+              <a:rPr sz="1700" b="1">
+                <a:solidFill>
+                  <a:srgbClr val="343A40"/>
+                </a:solidFill>
+                <a:latin typeface="Arial"/>
+              </a:rPr>
+              <a:t>Accumulation</a:t>
             </a:r>
           </a:p>
         </p:txBody>
@@ -8232,8 +8376,17 @@
                 </a:solidFill>
                 <a:latin typeface="Arial"/>
               </a:rPr>
-              <a:t>Next
-Source</a:t>
+              <a:t>Next</a:t>
+            </a:r>
+            <a:br/>
+            <a:r>
+              <a:rPr sz="1700" b="1">
+                <a:solidFill>
+                  <a:srgbClr val="343A40"/>
+                </a:solidFill>
+                <a:latin typeface="Arial"/>
+              </a:rPr>
+              <a:t>Source</a:t>
             </a:r>
           </a:p>
         </p:txBody>
@@ -8849,8 +9002,17 @@
                 </a:solidFill>
                 <a:latin typeface="Arial"/>
               </a:rPr>
-              <a:t>Unified Memory
-Managed Allocation</a:t>
+              <a:t>Unified Memory</a:t>
+            </a:r>
+            <a:br/>
+            <a:r>
+              <a:rPr sz="1800" b="1">
+                <a:solidFill>
+                  <a:srgbClr val="343A40"/>
+                </a:solidFill>
+                <a:latin typeface="Arial"/>
+              </a:rPr>
+              <a:t>Managed Allocation</a:t>
             </a:r>
           </a:p>
         </p:txBody>
@@ -9318,8 +9480,17 @@
                 </a:solidFill>
                 <a:latin typeface="Arial"/>
               </a:rPr>
-              <a:t>Source
-Batch</a:t>
+              <a:t>Source</a:t>
+            </a:r>
+            <a:br/>
+            <a:r>
+              <a:rPr sz="1800" b="1">
+                <a:solidFill>
+                  <a:srgbClr val="343A40"/>
+                </a:solidFill>
+                <a:latin typeface="Arial"/>
+              </a:rPr>
+              <a:t>Batch</a:t>
             </a:r>
           </a:p>
         </p:txBody>
@@ -9565,8 +9736,17 @@
                 </a:solidFill>
                 <a:latin typeface="Arial"/>
               </a:rPr>
-              <a:t>One Block
-per Source</a:t>
+              <a:t>One Block</a:t>
+            </a:r>
+            <a:br/>
+            <a:r>
+              <a:rPr sz="1800" b="1">
+                <a:solidFill>
+                  <a:srgbClr val="343A40"/>
+                </a:solidFill>
+                <a:latin typeface="Arial"/>
+              </a:rPr>
+              <a:t>per Source</a:t>
             </a:r>
           </a:p>
         </p:txBody>
@@ -9660,8 +9840,17 @@
                 </a:solidFill>
                 <a:latin typeface="Arial"/>
               </a:rPr>
-              <a:t>Hybrid
-BFS</a:t>
+              <a:t>Hybrid</a:t>
+            </a:r>
+            <a:br/>
+            <a:r>
+              <a:rPr sz="1800" b="1">
+                <a:solidFill>
+                  <a:srgbClr val="343A40"/>
+                </a:solidFill>
+                <a:latin typeface="Arial"/>
+              </a:rPr>
+              <a:t>BFS</a:t>
             </a:r>
           </a:p>
         </p:txBody>
@@ -9755,8 +9944,17 @@
                 </a:solidFill>
                 <a:latin typeface="Arial"/>
               </a:rPr>
-              <a:t>Dependency
-Accumulation</a:t>
+              <a:t>Dependency</a:t>
+            </a:r>
+            <a:br/>
+            <a:r>
+              <a:rPr sz="1700" b="1">
+                <a:solidFill>
+                  <a:srgbClr val="343A40"/>
+                </a:solidFill>
+                <a:latin typeface="Arial"/>
+              </a:rPr>
+              <a:t>Accumulation</a:t>
             </a:r>
           </a:p>
         </p:txBody>
@@ -9850,8 +10048,17 @@
                 </a:solidFill>
                 <a:latin typeface="Arial"/>
               </a:rPr>
-              <a:t>One Block
-per Source</a:t>
+              <a:t>One Block</a:t>
+            </a:r>
+            <a:br/>
+            <a:r>
+              <a:rPr sz="1800" b="1">
+                <a:solidFill>
+                  <a:srgbClr val="343A40"/>
+                </a:solidFill>
+                <a:latin typeface="Arial"/>
+              </a:rPr>
+              <a:t>per Source</a:t>
             </a:r>
           </a:p>
         </p:txBody>
@@ -9945,8 +10152,17 @@
                 </a:solidFill>
                 <a:latin typeface="Arial"/>
               </a:rPr>
-              <a:t>Hybrid
-BFS</a:t>
+              <a:t>Hybrid</a:t>
+            </a:r>
+            <a:br/>
+            <a:r>
+              <a:rPr sz="1800" b="1">
+                <a:solidFill>
+                  <a:srgbClr val="343A40"/>
+                </a:solidFill>
+                <a:latin typeface="Arial"/>
+              </a:rPr>
+              <a:t>BFS</a:t>
             </a:r>
           </a:p>
         </p:txBody>
@@ -10040,8 +10256,17 @@
                 </a:solidFill>
                 <a:latin typeface="Arial"/>
               </a:rPr>
-              <a:t>Dependency
-Accumulation</a:t>
+              <a:t>Dependency</a:t>
+            </a:r>
+            <a:br/>
+            <a:r>
+              <a:rPr sz="1700" b="1">
+                <a:solidFill>
+                  <a:srgbClr val="343A40"/>
+                </a:solidFill>
+                <a:latin typeface="Arial"/>
+              </a:rPr>
+              <a:t>Accumulation</a:t>
             </a:r>
           </a:p>
         </p:txBody>
@@ -10135,8 +10360,17 @@
                 </a:solidFill>
                 <a:latin typeface="Arial"/>
               </a:rPr>
-              <a:t>Global BC
-Accumulation</a:t>
+              <a:t>Global BC</a:t>
+            </a:r>
+            <a:br/>
+            <a:r>
+              <a:rPr sz="2000" b="1">
+                <a:solidFill>
+                  <a:srgbClr val="343A40"/>
+                </a:solidFill>
+                <a:latin typeface="Arial"/>
+              </a:rPr>
+              <a:t>Accumulation</a:t>
             </a:r>
           </a:p>
         </p:txBody>
@@ -10908,8 +11142,17 @@
                 </a:solidFill>
                 <a:latin typeface="Arial"/>
               </a:rPr>
-              <a:t>Effective
-Batch</a:t>
+              <a:t>Effective</a:t>
+            </a:r>
+            <a:br/>
+            <a:r>
+              <a:rPr sz="2000" b="1">
+                <a:solidFill>
+                  <a:srgbClr val="343A40"/>
+                </a:solidFill>
+                <a:latin typeface="Arial"/>
+              </a:rPr>
+              <a:t>Batch</a:t>
             </a:r>
           </a:p>
         </p:txBody>
@@ -12220,8 +12463,17 @@
                 </a:solidFill>
                 <a:latin typeface="Arial"/>
               </a:rPr>
-              <a:t>Shared full graph
-(static CSR)</a:t>
+              <a:t>Shared full graph</a:t>
+            </a:r>
+            <a:br/>
+            <a:r>
+              <a:rPr sz="1800" b="1">
+                <a:solidFill>
+                  <a:srgbClr val="343A40"/>
+                </a:solidFill>
+                <a:latin typeface="Arial"/>
+              </a:rPr>
+              <a:t>(static CSR)</a:t>
             </a:r>
           </a:p>
         </p:txBody>
@@ -12334,8 +12586,17 @@
                 </a:solidFill>
                 <a:latin typeface="Arial"/>
               </a:rPr>
-              <a:t>Both streams read
-the same CSR</a:t>
+              <a:t>Both streams read</a:t>
+            </a:r>
+            <a:br/>
+            <a:r>
+              <a:rPr sz="1400" b="1">
+                <a:solidFill>
+                  <a:srgbClr val="343A40"/>
+                </a:solidFill>
+                <a:latin typeface="Arial"/>
+              </a:rPr>
+              <a:t>the same CSR</a:t>
             </a:r>
           </a:p>
         </p:txBody>
@@ -12374,9 +12635,27 @@
                 </a:solidFill>
                 <a:latin typeface="Arial"/>
               </a:rPr>
-              <a:t>Batching groups sources;
-it does not partition
-the graph.</a:t>
+              <a:t>Batching groups sources;</a:t>
+            </a:r>
+            <a:br/>
+            <a:r>
+              <a:rPr sz="1600" b="1">
+                <a:solidFill>
+                  <a:srgbClr val="C23B22"/>
+                </a:solidFill>
+                <a:latin typeface="Arial"/>
+              </a:rPr>
+              <a:t>it does not partition</a:t>
+            </a:r>
+            <a:br/>
+            <a:r>
+              <a:rPr sz="1600" b="1">
+                <a:solidFill>
+                  <a:srgbClr val="C23B22"/>
+                </a:solidFill>
+                <a:latin typeface="Arial"/>
+              </a:rPr>
+              <a:t>the graph.</a:t>
             </a:r>
           </a:p>
         </p:txBody>
@@ -12759,8 +13038,17 @@
                 </a:solidFill>
                 <a:latin typeface="Arial"/>
               </a:rPr>
-              <a:t>Switch when
-m_f &gt; m_u / alpha</a:t>
+              <a:t>Switch when</a:t>
+            </a:r>
+            <a:br/>
+            <a:r>
+              <a:rPr sz="1600" b="1">
+                <a:solidFill>
+                  <a:srgbClr val="0072B2"/>
+                </a:solidFill>
+                <a:latin typeface="Arial"/>
+              </a:rPr>
+              <a:t>m_f &gt; m_u / alpha</a:t>
             </a:r>
           </a:p>
         </p:txBody>
@@ -12799,8 +13087,17 @@
                 </a:solidFill>
                 <a:latin typeface="Arial"/>
               </a:rPr>
-              <a:t>Return when
-|Q| &lt; n / beta</a:t>
+              <a:t>Return when</a:t>
+            </a:r>
+            <a:br/>
+            <a:r>
+              <a:rPr sz="1600" b="1">
+                <a:solidFill>
+                  <a:srgbClr val="009E73"/>
+                </a:solidFill>
+                <a:latin typeface="Arial"/>
+              </a:rPr>
+              <a:t>|Q| &lt; n / beta</a:t>
             </a:r>
           </a:p>
         </p:txBody>
@@ -14378,8 +14675,17 @@
                 </a:solidFill>
                 <a:latin typeface="Arial"/>
               </a:rPr>
-              <a:t>Managed allocation
-Host/HBM placement</a:t>
+              <a:t>Managed allocation</a:t>
+            </a:r>
+            <a:br/>
+            <a:r>
+              <a:rPr sz="1500" b="0">
+                <a:solidFill>
+                  <a:srgbClr val="343A40"/>
+                </a:solidFill>
+                <a:latin typeface="Arial"/>
+              </a:rPr>
+              <a:t>Host/HBM placement</a:t>
             </a:r>
           </a:p>
         </p:txBody>
@@ -14554,9 +14860,27 @@
                 </a:solidFill>
                 <a:latin typeface="Arial"/>
               </a:rPr>
-              <a:t>Device allocation
-Capacity-bound
-working set</a:t>
+              <a:t>Device allocation</a:t>
+            </a:r>
+            <a:br/>
+            <a:r>
+              <a:rPr sz="1500" b="0">
+                <a:solidFill>
+                  <a:srgbClr val="343A40"/>
+                </a:solidFill>
+                <a:latin typeface="Arial"/>
+              </a:rPr>
+              <a:t>Capacity-bound</a:t>
+            </a:r>
+            <a:br/>
+            <a:r>
+              <a:rPr sz="1500" b="0">
+                <a:solidFill>
+                  <a:srgbClr val="343A40"/>
+                </a:solidFill>
+                <a:latin typeface="Arial"/>
+              </a:rPr>
+              <a:t>working set</a:t>
             </a:r>
           </a:p>
         </p:txBody>
@@ -14731,9 +15055,27 @@
                 </a:solidFill>
                 <a:latin typeface="Arial"/>
               </a:rPr>
-              <a:t>Limits resident
-source state
-Full graph reused</a:t>
+              <a:t>Limits resident</a:t>
+            </a:r>
+            <a:br/>
+            <a:r>
+              <a:rPr sz="1500" b="0">
+                <a:solidFill>
+                  <a:srgbClr val="343A40"/>
+                </a:solidFill>
+                <a:latin typeface="Arial"/>
+              </a:rPr>
+              <a:t>source state</a:t>
+            </a:r>
+            <a:br/>
+            <a:r>
+              <a:rPr sz="1500" b="0">
+                <a:solidFill>
+                  <a:srgbClr val="343A40"/>
+                </a:solidFill>
+                <a:latin typeface="Arial"/>
+              </a:rPr>
+              <a:t>Full graph reused</a:t>
             </a:r>
           </a:p>
         </p:txBody>
@@ -14772,8 +15114,17 @@
                 </a:solidFill>
                 <a:latin typeface="Arial"/>
               </a:rPr>
-              <a:t>Memory-management variants of one framework -- not three independent proposals.
-Chunked partitions the source set, not the input graph.</a:t>
+              <a:t>Memory-management variants of one framework -- not three independent proposals.</a:t>
+            </a:r>
+            <a:br/>
+            <a:r>
+              <a:rPr sz="1800" b="1">
+                <a:solidFill>
+                  <a:srgbClr val="343A40"/>
+                </a:solidFill>
+                <a:latin typeface="Arial"/>
+              </a:rPr>
+              <a:t>Chunked partitions the source set, not the input graph.</a:t>
             </a:r>
           </a:p>
         </p:txBody>
